--- a/Mango-M32F4/0.Introduction/introduction.pptx
+++ b/Mango-M32F4/0.Introduction/introduction.pptx
@@ -3693,12 +3693,32 @@
           </a:p>
           <a:p>
             <a:r>
+              <a:rPr lang="ko-KR" altLang="en-US" dirty="0"/>
+              <a:t>회로도 </a:t>
+            </a:r>
+            <a:r>
+              <a:rPr lang="en-US" altLang="ko-KR" dirty="0"/>
+              <a:t>: </a:t>
+            </a:r>
+            <a:r>
+              <a:rPr lang="en-US" altLang="ko-KR" dirty="0">
+                <a:hlinkClick r:id="rId7"/>
+              </a:rPr>
+              <a:t>https://www.devicemart.co.kr/goods/download?id=1311799&amp;rank=1</a:t>
+            </a:r>
+            <a:endParaRPr lang="en-US" altLang="ko-KR" dirty="0"/>
+          </a:p>
+          <a:p>
+            <a:endParaRPr lang="en-US" altLang="ko-KR" dirty="0"/>
+          </a:p>
+          <a:p>
+            <a:r>
               <a:rPr lang="en-US" altLang="ko-KR" dirty="0"/>
               <a:t>Contact : </a:t>
             </a:r>
             <a:r>
               <a:rPr lang="en-US" altLang="ko-KR" dirty="0">
-                <a:hlinkClick r:id="rId7"/>
+                <a:hlinkClick r:id="rId8"/>
               </a:rPr>
               <a:t>help@crz-tech.com</a:t>
             </a:r>
